--- a/MicroPure_Pitch.pptx
+++ b/MicroPure_Pitch.pptx
@@ -14499,7 +14499,7 @@
         <p:spPr>
           <a:xfrm>
             <a:off x="548640" y="868680"/>
-            <a:ext cx="10972800" cy="914400"/>
+            <a:ext cx="11155680" cy="914400"/>
           </a:xfrm>
           <a:prstGeom prst="rect">
             <a:avLst/>
@@ -14527,7 +14527,7 @@
                 </a:solidFill>
                 <a:latin typeface="Calibri"/>
               </a:rPr>
-              <a:t>Lean now. Path to </a:t>
+              <a:t>Lean spend, </a:t>
             </a:r>
           </a:p>
           <a:p>
@@ -14546,7 +14546,7 @@
                 </a:solidFill>
                 <a:latin typeface="Calibri"/>
               </a:rPr>
-              <a:t>$2.4M ARR</a:t>
+              <a:t>staged rollout</a:t>
             </a:r>
           </a:p>
           <a:p>
@@ -14565,7 +14565,7 @@
                 </a:solidFill>
                 <a:latin typeface="Calibri"/>
               </a:rPr>
-              <a:t> in three years.</a:t>
+              <a:t> — every quarter ships a new product and a new tier.</a:t>
             </a:r>
           </a:p>
         </p:txBody>
@@ -14579,7 +14579,7 @@
         <p:spPr>
           <a:xfrm>
             <a:off x="548640" y="2103120"/>
-            <a:ext cx="5120640" cy="4206240"/>
+            <a:ext cx="4206240" cy="4206240"/>
           </a:xfrm>
           <a:prstGeom prst="roundRect">
             <a:avLst>
@@ -14717,7 +14717,7 @@
         <p:spPr>
           <a:xfrm>
             <a:off x="822960" y="2880360"/>
-            <a:ext cx="4572000" cy="228600"/>
+            <a:ext cx="3657600" cy="228600"/>
           </a:xfrm>
           <a:prstGeom prst="rect">
             <a:avLst/>
@@ -14759,7 +14759,7 @@
         <p:spPr>
           <a:xfrm>
             <a:off x="822960" y="3136392"/>
-            <a:ext cx="4663440" cy="164592"/>
+            <a:ext cx="3749040" cy="164592"/>
           </a:xfrm>
           <a:prstGeom prst="roundRect">
             <a:avLst>
@@ -14805,7 +14805,7 @@
         <p:spPr>
           <a:xfrm>
             <a:off x="822960" y="3136392"/>
-            <a:ext cx="1772107" cy="164592"/>
+            <a:ext cx="1424635" cy="164592"/>
           </a:xfrm>
           <a:prstGeom prst="roundRect">
             <a:avLst>
@@ -14850,8 +14850,8 @@
         </p:nvSpPr>
         <p:spPr>
           <a:xfrm>
-            <a:off x="822960" y="3429000"/>
-            <a:ext cx="4572000" cy="228600"/>
+            <a:off x="822960" y="3383280"/>
+            <a:ext cx="3657600" cy="228600"/>
           </a:xfrm>
           <a:prstGeom prst="rect">
             <a:avLst/>
@@ -14892,8 +14892,8 @@
         </p:nvSpPr>
         <p:spPr>
           <a:xfrm>
-            <a:off x="822960" y="3685032"/>
-            <a:ext cx="4663440" cy="164592"/>
+            <a:off x="822960" y="3639312"/>
+            <a:ext cx="3749040" cy="164592"/>
           </a:xfrm>
           <a:prstGeom prst="roundRect">
             <a:avLst>
@@ -14938,8 +14938,8 @@
         </p:nvSpPr>
         <p:spPr>
           <a:xfrm>
-            <a:off x="822960" y="3685032"/>
-            <a:ext cx="1025956" cy="164592"/>
+            <a:off x="822960" y="3639312"/>
+            <a:ext cx="824788" cy="164592"/>
           </a:xfrm>
           <a:prstGeom prst="roundRect">
             <a:avLst>
@@ -14984,8 +14984,8 @@
         </p:nvSpPr>
         <p:spPr>
           <a:xfrm>
-            <a:off x="822960" y="3977640"/>
-            <a:ext cx="4572000" cy="228600"/>
+            <a:off x="822960" y="3886200"/>
+            <a:ext cx="3657600" cy="228600"/>
           </a:xfrm>
           <a:prstGeom prst="rect">
             <a:avLst/>
@@ -15026,8 +15026,8 @@
         </p:nvSpPr>
         <p:spPr>
           <a:xfrm>
-            <a:off x="822960" y="4233672"/>
-            <a:ext cx="4663440" cy="164592"/>
+            <a:off x="822960" y="4142232"/>
+            <a:ext cx="3749040" cy="164592"/>
           </a:xfrm>
           <a:prstGeom prst="roundRect">
             <a:avLst>
@@ -15072,8 +15072,8 @@
         </p:nvSpPr>
         <p:spPr>
           <a:xfrm>
-            <a:off x="822960" y="4233672"/>
-            <a:ext cx="652881" cy="164592"/>
+            <a:off x="822960" y="4142232"/>
+            <a:ext cx="524865" cy="164592"/>
           </a:xfrm>
           <a:prstGeom prst="roundRect">
             <a:avLst>
@@ -15118,8 +15118,8 @@
         </p:nvSpPr>
         <p:spPr>
           <a:xfrm>
-            <a:off x="822960" y="4526280"/>
-            <a:ext cx="4572000" cy="228600"/>
+            <a:off x="822960" y="4389120"/>
+            <a:ext cx="3657600" cy="228600"/>
           </a:xfrm>
           <a:prstGeom prst="rect">
             <a:avLst/>
@@ -15160,8 +15160,8 @@
         </p:nvSpPr>
         <p:spPr>
           <a:xfrm>
-            <a:off x="822960" y="4782312"/>
-            <a:ext cx="4663440" cy="164592"/>
+            <a:off x="822960" y="4645152"/>
+            <a:ext cx="3749040" cy="164592"/>
           </a:xfrm>
           <a:prstGeom prst="roundRect">
             <a:avLst>
@@ -15206,8 +15206,8 @@
         </p:nvSpPr>
         <p:spPr>
           <a:xfrm>
-            <a:off x="822960" y="4782312"/>
-            <a:ext cx="466344" cy="164592"/>
+            <a:off x="822960" y="4645152"/>
+            <a:ext cx="374904" cy="164592"/>
           </a:xfrm>
           <a:prstGeom prst="roundRect">
             <a:avLst>
@@ -15252,8 +15252,8 @@
         </p:nvSpPr>
         <p:spPr>
           <a:xfrm>
-            <a:off x="822960" y="5074920"/>
-            <a:ext cx="4572000" cy="228600"/>
+            <a:off x="822960" y="4892040"/>
+            <a:ext cx="3657600" cy="228600"/>
           </a:xfrm>
           <a:prstGeom prst="rect">
             <a:avLst/>
@@ -15294,8 +15294,8 @@
         </p:nvSpPr>
         <p:spPr>
           <a:xfrm>
-            <a:off x="822960" y="5330952"/>
-            <a:ext cx="4663440" cy="164592"/>
+            <a:off x="822960" y="5148072"/>
+            <a:ext cx="3749040" cy="164592"/>
           </a:xfrm>
           <a:prstGeom prst="roundRect">
             <a:avLst>
@@ -15340,8 +15340,8 @@
         </p:nvSpPr>
         <p:spPr>
           <a:xfrm>
-            <a:off x="822960" y="5330952"/>
-            <a:ext cx="373075" cy="164592"/>
+            <a:off x="822960" y="5148072"/>
+            <a:ext cx="299923" cy="164592"/>
           </a:xfrm>
           <a:prstGeom prst="roundRect">
             <a:avLst>
@@ -15386,8 +15386,8 @@
         </p:nvSpPr>
         <p:spPr>
           <a:xfrm>
-            <a:off x="822960" y="5623560"/>
-            <a:ext cx="4572000" cy="228600"/>
+            <a:off x="822960" y="5394960"/>
+            <a:ext cx="3657600" cy="228600"/>
           </a:xfrm>
           <a:prstGeom prst="rect">
             <a:avLst/>
@@ -15428,8 +15428,8 @@
         </p:nvSpPr>
         <p:spPr>
           <a:xfrm>
-            <a:off x="822960" y="5879592"/>
-            <a:ext cx="4663440" cy="164592"/>
+            <a:off x="822960" y="5650992"/>
+            <a:ext cx="3749040" cy="164592"/>
           </a:xfrm>
           <a:prstGeom prst="roundRect">
             <a:avLst>
@@ -15474,8 +15474,8 @@
         </p:nvSpPr>
         <p:spPr>
           <a:xfrm>
-            <a:off x="822960" y="5879592"/>
-            <a:ext cx="373075" cy="164592"/>
+            <a:off x="822960" y="5650992"/>
+            <a:ext cx="299923" cy="164592"/>
           </a:xfrm>
           <a:prstGeom prst="roundRect">
             <a:avLst>
@@ -15520,8 +15520,8 @@
         </p:nvSpPr>
         <p:spPr>
           <a:xfrm>
-            <a:off x="822960" y="5715000"/>
-            <a:ext cx="4572000" cy="457200"/>
+            <a:off x="822960" y="5760720"/>
+            <a:ext cx="3657600" cy="411480"/>
           </a:xfrm>
           <a:prstGeom prst="rect">
             <a:avLst/>
@@ -15549,7 +15549,7 @@
                 </a:solidFill>
                 <a:latin typeface="Calibri"/>
               </a:rPr>
-              <a:t>~80% gross margin at scale  ·  &lt; $0.001 marginal cost per local scan</a:t>
+              <a:t>~80% gross margin  ·  &lt; $0.001 per local scan</a:t>
             </a:r>
           </a:p>
         </p:txBody>
@@ -15562,8 +15562,8 @@
         </p:nvSpPr>
         <p:spPr>
           <a:xfrm>
-            <a:off x="5943600" y="2103120"/>
-            <a:ext cx="5760720" cy="1280160"/>
+            <a:off x="4937760" y="2103120"/>
+            <a:ext cx="6766560" cy="978408"/>
           </a:xfrm>
           <a:prstGeom prst="roundRect">
             <a:avLst>
@@ -15604,14 +15604,62 @@
       </p:sp>
       <p:sp>
         <p:nvSpPr>
-          <p:cNvPr id="29" name="TextBox 28"/>
-          <p:cNvSpPr txBox="1"/>
-          <p:nvPr/>
-        </p:nvSpPr>
-        <p:spPr>
-          <a:xfrm>
-            <a:off x="6172200" y="2286000"/>
-            <a:ext cx="2286000" cy="365760"/>
+          <p:cNvPr id="29" name="Rounded Rectangle 28"/>
+          <p:cNvSpPr/>
+          <p:nvPr/>
+        </p:nvSpPr>
+        <p:spPr>
+          <a:xfrm>
+            <a:off x="5102352" y="2267712"/>
+            <a:ext cx="1051560" cy="649224"/>
+          </a:xfrm>
+          <a:prstGeom prst="roundRect">
+            <a:avLst>
+              <a:gd name="adj" fmla="val 18000"/>
+            </a:avLst>
+          </a:prstGeom>
+          <a:solidFill>
+            <a:srgbClr val="101830"/>
+          </a:solidFill>
+          <a:ln w="9525">
+            <a:solidFill>
+              <a:srgbClr val="22D3EE"/>
+            </a:solidFill>
+          </a:ln>
+          <a:effectLst/>
+        </p:spPr>
+        <p:style>
+          <a:lnRef idx="1">
+            <a:schemeClr val="accent1"/>
+          </a:lnRef>
+          <a:fillRef idx="3">
+            <a:schemeClr val="accent1"/>
+          </a:fillRef>
+          <a:effectRef idx="2">
+            <a:schemeClr val="accent1"/>
+          </a:effectRef>
+          <a:fontRef idx="minor">
+            <a:schemeClr val="lt1"/>
+          </a:fontRef>
+        </p:style>
+        <p:txBody>
+          <a:bodyPr rtlCol="0" anchor="ctr"/>
+          <a:lstStyle/>
+          <a:p>
+            <a:pPr algn="ctr"/>
+          </a:p>
+        </p:txBody>
+      </p:sp>
+      <p:sp>
+        <p:nvSpPr>
+          <p:cNvPr id="30" name="TextBox 29"/>
+          <p:cNvSpPr txBox="1"/>
+          <p:nvPr/>
+        </p:nvSpPr>
+        <p:spPr>
+          <a:xfrm>
+            <a:off x="5102352" y="2304288"/>
+            <a:ext cx="1051560" cy="292608"/>
           </a:xfrm>
           <a:prstGeom prst="rect">
             <a:avLst/>
@@ -15624,7 +15672,7 @@
           </a:bodyPr>
           <a:lstStyle/>
           <a:p>
-            <a:pPr algn="l">
+            <a:pPr algn="ctr">
               <a:lnSpc>
                 <a:spcPct val="115000"/>
               </a:lnSpc>
@@ -15633,27 +15681,27 @@
               </a:spcAft>
             </a:pPr>
             <a:r>
-              <a:rPr sz="1400" b="1">
-                <a:solidFill>
-                  <a:srgbClr val="E6EDF7"/>
-                </a:solidFill>
-                <a:latin typeface="Calibri"/>
-              </a:rPr>
-              <a:t>Y1 · Validate</a:t>
-            </a:r>
-          </a:p>
-        </p:txBody>
-      </p:sp>
-      <p:sp>
-        <p:nvSpPr>
-          <p:cNvPr id="30" name="TextBox 29"/>
-          <p:cNvSpPr txBox="1"/>
-          <p:nvPr/>
-        </p:nvSpPr>
-        <p:spPr>
-          <a:xfrm>
-            <a:off x="6172200" y="2651760"/>
-            <a:ext cx="2286000" cy="640080"/>
+              <a:rPr sz="1000" b="1">
+                <a:solidFill>
+                  <a:srgbClr val="22D3EE"/>
+                </a:solidFill>
+                <a:latin typeface="Calibri"/>
+              </a:rPr>
+              <a:t>3 MONTHS</a:t>
+            </a:r>
+          </a:p>
+        </p:txBody>
+      </p:sp>
+      <p:sp>
+        <p:nvSpPr>
+          <p:cNvPr id="31" name="TextBox 30"/>
+          <p:cNvSpPr txBox="1"/>
+          <p:nvPr/>
+        </p:nvSpPr>
+        <p:spPr>
+          <a:xfrm>
+            <a:off x="5102352" y="2560320"/>
+            <a:ext cx="1051560" cy="365760"/>
           </a:xfrm>
           <a:prstGeom prst="rect">
             <a:avLst/>
@@ -15666,36 +15714,36 @@
           </a:bodyPr>
           <a:lstStyle/>
           <a:p>
-            <a:pPr algn="l">
-              <a:lnSpc>
-                <a:spcPct val="115000"/>
+            <a:pPr algn="ctr">
+              <a:lnSpc>
+                <a:spcPct val="110000"/>
               </a:lnSpc>
               <a:spcAft>
                 <a:spcPts val="0"/>
               </a:spcAft>
             </a:pPr>
             <a:r>
-              <a:rPr sz="3200" b="1">
-                <a:solidFill>
-                  <a:srgbClr val="22D3EE"/>
-                </a:solidFill>
-                <a:latin typeface="Calibri"/>
-              </a:rPr>
-              <a:t>$48K</a:t>
-            </a:r>
-          </a:p>
-        </p:txBody>
-      </p:sp>
-      <p:sp>
-        <p:nvSpPr>
-          <p:cNvPr id="31" name="TextBox 30"/>
-          <p:cNvSpPr txBox="1"/>
-          <p:nvPr/>
-        </p:nvSpPr>
-        <p:spPr>
-          <a:xfrm>
-            <a:off x="8321040" y="2331720"/>
-            <a:ext cx="3154680" cy="365760"/>
+              <a:rPr sz="1200" b="1">
+                <a:solidFill>
+                  <a:srgbClr val="E6EDF7"/>
+                </a:solidFill>
+                <a:latin typeface="Calibri"/>
+              </a:rPr>
+              <a:t>Free launch</a:t>
+            </a:r>
+          </a:p>
+        </p:txBody>
+      </p:sp>
+      <p:sp>
+        <p:nvSpPr>
+          <p:cNvPr id="32" name="TextBox 31"/>
+          <p:cNvSpPr txBox="1"/>
+          <p:nvPr/>
+        </p:nvSpPr>
+        <p:spPr>
+          <a:xfrm>
+            <a:off x="6309360" y="2267712"/>
+            <a:ext cx="2194560" cy="292608"/>
           </a:xfrm>
           <a:prstGeom prst="rect">
             <a:avLst/>
@@ -15717,27 +15765,27 @@
               </a:spcAft>
             </a:pPr>
             <a:r>
-              <a:rPr sz="1100" b="1">
-                <a:solidFill>
-                  <a:srgbClr val="E6EDF7"/>
-                </a:solidFill>
-                <a:latin typeface="Calibri"/>
-              </a:rPr>
-              <a:t>5k Free · 250 Pro · 5 Team</a:t>
-            </a:r>
-          </a:p>
-        </p:txBody>
-      </p:sp>
-      <p:sp>
-        <p:nvSpPr>
-          <p:cNvPr id="32" name="TextBox 31"/>
-          <p:cNvSpPr txBox="1"/>
-          <p:nvPr/>
-        </p:nvSpPr>
-        <p:spPr>
-          <a:xfrm>
-            <a:off x="8321040" y="2743200"/>
-            <a:ext cx="3154680" cy="457200"/>
+              <a:rPr sz="1000" b="1">
+                <a:solidFill>
+                  <a:srgbClr val="94A3C4"/>
+                </a:solidFill>
+                <a:latin typeface="Calibri"/>
+              </a:rPr>
+              <a:t>FREE</a:t>
+            </a:r>
+          </a:p>
+        </p:txBody>
+      </p:sp>
+      <p:sp>
+        <p:nvSpPr>
+          <p:cNvPr id="33" name="TextBox 32"/>
+          <p:cNvSpPr txBox="1"/>
+          <p:nvPr/>
+        </p:nvSpPr>
+        <p:spPr>
+          <a:xfrm>
+            <a:off x="6309360" y="2514600"/>
+            <a:ext cx="2194560" cy="411480"/>
           </a:xfrm>
           <a:prstGeom prst="rect">
             <a:avLst/>
@@ -15759,27 +15807,153 @@
               </a:spcAft>
             </a:pPr>
             <a:r>
-              <a:rPr sz="1100" b="0">
+              <a:rPr sz="1800" b="1">
+                <a:solidFill>
+                  <a:srgbClr val="22D3EE"/>
+                </a:solidFill>
+                <a:latin typeface="Calibri"/>
+              </a:rPr>
+              <a:t>$0</a:t>
+            </a:r>
+          </a:p>
+        </p:txBody>
+      </p:sp>
+      <p:sp>
+        <p:nvSpPr>
+          <p:cNvPr id="34" name="TextBox 33"/>
+          <p:cNvSpPr txBox="1"/>
+          <p:nvPr/>
+        </p:nvSpPr>
+        <p:spPr>
+          <a:xfrm>
+            <a:off x="6309360" y="2816352"/>
+            <a:ext cx="2194560" cy="292608"/>
+          </a:xfrm>
+          <a:prstGeom prst="rect">
+            <a:avLst/>
+          </a:prstGeom>
+          <a:noFill/>
+        </p:spPr>
+        <p:txBody>
+          <a:bodyPr wrap="square" lIns="45720" rIns="45720" tIns="18288" bIns="18288" anchor="t">
+            <a:spAutoFit/>
+          </a:bodyPr>
+          <a:lstStyle/>
+          <a:p>
+            <a:pPr algn="l">
+              <a:lnSpc>
+                <a:spcPct val="125000"/>
+              </a:lnSpc>
+              <a:spcAft>
+                <a:spcPts val="0"/>
+              </a:spcAft>
+            </a:pPr>
+            <a:r>
+              <a:rPr sz="950" b="0">
                 <a:solidFill>
                   <a:srgbClr val="94A3C4"/>
                 </a:solidFill>
                 <a:latin typeface="Calibri"/>
               </a:rPr>
-              <a:t>$120K spend · grant + bootstrap</a:t>
-            </a:r>
-          </a:p>
-        </p:txBody>
-      </p:sp>
-      <p:sp>
-        <p:nvSpPr>
-          <p:cNvPr id="33" name="Rounded Rectangle 32"/>
+              <a:t>Local app · open dataset · Discord community</a:t>
+            </a:r>
+          </a:p>
+        </p:txBody>
+      </p:sp>
+      <p:sp>
+        <p:nvSpPr>
+          <p:cNvPr id="35" name="TextBox 34"/>
+          <p:cNvSpPr txBox="1"/>
+          <p:nvPr/>
+        </p:nvSpPr>
+        <p:spPr>
+          <a:xfrm>
+            <a:off x="8686799" y="2267712"/>
+            <a:ext cx="2926080" cy="292608"/>
+          </a:xfrm>
+          <a:prstGeom prst="rect">
+            <a:avLst/>
+          </a:prstGeom>
+          <a:noFill/>
+        </p:spPr>
+        <p:txBody>
+          <a:bodyPr wrap="square" lIns="45720" rIns="45720" tIns="18288" bIns="18288" anchor="t">
+            <a:spAutoFit/>
+          </a:bodyPr>
+          <a:lstStyle/>
+          <a:p>
+            <a:pPr algn="l">
+              <a:lnSpc>
+                <a:spcPct val="115000"/>
+              </a:lnSpc>
+              <a:spcAft>
+                <a:spcPts val="0"/>
+              </a:spcAft>
+            </a:pPr>
+            <a:r>
+              <a:rPr sz="1000" b="1">
+                <a:solidFill>
+                  <a:srgbClr val="94A3C4"/>
+                </a:solidFill>
+                <a:latin typeface="Calibri"/>
+              </a:rPr>
+              <a:t>TRACTION</a:t>
+            </a:r>
+          </a:p>
+        </p:txBody>
+      </p:sp>
+      <p:sp>
+        <p:nvSpPr>
+          <p:cNvPr id="36" name="TextBox 35"/>
+          <p:cNvSpPr txBox="1"/>
+          <p:nvPr/>
+        </p:nvSpPr>
+        <p:spPr>
+          <a:xfrm>
+            <a:off x="8686799" y="2514600"/>
+            <a:ext cx="2926080" cy="548640"/>
+          </a:xfrm>
+          <a:prstGeom prst="rect">
+            <a:avLst/>
+          </a:prstGeom>
+          <a:noFill/>
+        </p:spPr>
+        <p:txBody>
+          <a:bodyPr wrap="square" lIns="45720" rIns="45720" tIns="18288" bIns="18288" anchor="t">
+            <a:spAutoFit/>
+          </a:bodyPr>
+          <a:lstStyle/>
+          <a:p>
+            <a:pPr algn="l">
+              <a:lnSpc>
+                <a:spcPct val="130000"/>
+              </a:lnSpc>
+              <a:spcAft>
+                <a:spcPts val="0"/>
+              </a:spcAft>
+            </a:pPr>
+            <a:r>
+              <a:rPr sz="1200" b="1">
+                <a:solidFill>
+                  <a:srgbClr val="E6EDF7"/>
+                </a:solidFill>
+                <a:latin typeface="Calibri"/>
+              </a:rPr>
+              <a:t>1.5k users  ·  $0 ARR</a:t>
+            </a:r>
+          </a:p>
+        </p:txBody>
+      </p:sp>
+      <p:sp>
+        <p:nvSpPr>
+          <p:cNvPr id="37" name="Rounded Rectangle 36"/>
           <p:cNvSpPr/>
           <p:nvPr/>
         </p:nvSpPr>
         <p:spPr>
           <a:xfrm>
-            <a:off x="5943600" y="3474720"/>
-            <a:ext cx="5760720" cy="1280160"/>
+            <a:off x="4937760" y="3172968"/>
+            <a:ext cx="6766560" cy="978408"/>
           </a:xfrm>
           <a:prstGeom prst="roundRect">
             <a:avLst>
@@ -15820,14 +15994,62 @@
       </p:sp>
       <p:sp>
         <p:nvSpPr>
-          <p:cNvPr id="34" name="TextBox 33"/>
-          <p:cNvSpPr txBox="1"/>
-          <p:nvPr/>
-        </p:nvSpPr>
-        <p:spPr>
-          <a:xfrm>
-            <a:off x="6172200" y="3657600"/>
-            <a:ext cx="2286000" cy="365760"/>
+          <p:cNvPr id="38" name="Rounded Rectangle 37"/>
+          <p:cNvSpPr/>
+          <p:nvPr/>
+        </p:nvSpPr>
+        <p:spPr>
+          <a:xfrm>
+            <a:off x="5102352" y="3337560"/>
+            <a:ext cx="1051560" cy="649224"/>
+          </a:xfrm>
+          <a:prstGeom prst="roundRect">
+            <a:avLst>
+              <a:gd name="adj" fmla="val 18000"/>
+            </a:avLst>
+          </a:prstGeom>
+          <a:solidFill>
+            <a:srgbClr val="101830"/>
+          </a:solidFill>
+          <a:ln w="9525">
+            <a:solidFill>
+              <a:srgbClr val="A78BFA"/>
+            </a:solidFill>
+          </a:ln>
+          <a:effectLst/>
+        </p:spPr>
+        <p:style>
+          <a:lnRef idx="1">
+            <a:schemeClr val="accent1"/>
+          </a:lnRef>
+          <a:fillRef idx="3">
+            <a:schemeClr val="accent1"/>
+          </a:fillRef>
+          <a:effectRef idx="2">
+            <a:schemeClr val="accent1"/>
+          </a:effectRef>
+          <a:fontRef idx="minor">
+            <a:schemeClr val="lt1"/>
+          </a:fontRef>
+        </p:style>
+        <p:txBody>
+          <a:bodyPr rtlCol="0" anchor="ctr"/>
+          <a:lstStyle/>
+          <a:p>
+            <a:pPr algn="ctr"/>
+          </a:p>
+        </p:txBody>
+      </p:sp>
+      <p:sp>
+        <p:nvSpPr>
+          <p:cNvPr id="39" name="TextBox 38"/>
+          <p:cNvSpPr txBox="1"/>
+          <p:nvPr/>
+        </p:nvSpPr>
+        <p:spPr>
+          <a:xfrm>
+            <a:off x="5102352" y="3374136"/>
+            <a:ext cx="1051560" cy="292608"/>
           </a:xfrm>
           <a:prstGeom prst="rect">
             <a:avLst/>
@@ -15840,7 +16062,7 @@
           </a:bodyPr>
           <a:lstStyle/>
           <a:p>
-            <a:pPr algn="l">
+            <a:pPr algn="ctr">
               <a:lnSpc>
                 <a:spcPct val="115000"/>
               </a:lnSpc>
@@ -15849,27 +16071,27 @@
               </a:spcAft>
             </a:pPr>
             <a:r>
-              <a:rPr sz="1400" b="1">
-                <a:solidFill>
-                  <a:srgbClr val="E6EDF7"/>
-                </a:solidFill>
-                <a:latin typeface="Calibri"/>
-              </a:rPr>
-              <a:t>Y2 · Educate</a:t>
-            </a:r>
-          </a:p>
-        </p:txBody>
-      </p:sp>
-      <p:sp>
-        <p:nvSpPr>
-          <p:cNvPr id="35" name="TextBox 34"/>
-          <p:cNvSpPr txBox="1"/>
-          <p:nvPr/>
-        </p:nvSpPr>
-        <p:spPr>
-          <a:xfrm>
-            <a:off x="6172200" y="4023360"/>
-            <a:ext cx="2286000" cy="640080"/>
+              <a:rPr sz="1000" b="1">
+                <a:solidFill>
+                  <a:srgbClr val="A78BFA"/>
+                </a:solidFill>
+                <a:latin typeface="Calibri"/>
+              </a:rPr>
+              <a:t>6 MONTHS</a:t>
+            </a:r>
+          </a:p>
+        </p:txBody>
+      </p:sp>
+      <p:sp>
+        <p:nvSpPr>
+          <p:cNvPr id="40" name="TextBox 39"/>
+          <p:cNvSpPr txBox="1"/>
+          <p:nvPr/>
+        </p:nvSpPr>
+        <p:spPr>
+          <a:xfrm>
+            <a:off x="5102352" y="3630168"/>
+            <a:ext cx="1051560" cy="365760"/>
           </a:xfrm>
           <a:prstGeom prst="rect">
             <a:avLst/>
@@ -15882,36 +16104,36 @@
           </a:bodyPr>
           <a:lstStyle/>
           <a:p>
-            <a:pPr algn="l">
-              <a:lnSpc>
-                <a:spcPct val="115000"/>
+            <a:pPr algn="ctr">
+              <a:lnSpc>
+                <a:spcPct val="110000"/>
               </a:lnSpc>
               <a:spcAft>
                 <a:spcPts val="0"/>
               </a:spcAft>
             </a:pPr>
             <a:r>
-              <a:rPr sz="3200" b="1">
-                <a:solidFill>
-                  <a:srgbClr val="A78BFA"/>
-                </a:solidFill>
-                <a:latin typeface="Calibri"/>
-              </a:rPr>
-              <a:t>$420K</a:t>
-            </a:r>
-          </a:p>
-        </p:txBody>
-      </p:sp>
-      <p:sp>
-        <p:nvSpPr>
-          <p:cNvPr id="36" name="TextBox 35"/>
-          <p:cNvSpPr txBox="1"/>
-          <p:nvPr/>
-        </p:nvSpPr>
-        <p:spPr>
-          <a:xfrm>
-            <a:off x="8321040" y="3703320"/>
-            <a:ext cx="3154680" cy="365760"/>
+              <a:rPr sz="1200" b="1">
+                <a:solidFill>
+                  <a:srgbClr val="E6EDF7"/>
+                </a:solidFill>
+                <a:latin typeface="Calibri"/>
+              </a:rPr>
+              <a:t>Pro tier live</a:t>
+            </a:r>
+          </a:p>
+        </p:txBody>
+      </p:sp>
+      <p:sp>
+        <p:nvSpPr>
+          <p:cNvPr id="41" name="TextBox 40"/>
+          <p:cNvSpPr txBox="1"/>
+          <p:nvPr/>
+        </p:nvSpPr>
+        <p:spPr>
+          <a:xfrm>
+            <a:off x="6309360" y="3337560"/>
+            <a:ext cx="2194560" cy="292608"/>
           </a:xfrm>
           <a:prstGeom prst="rect">
             <a:avLst/>
@@ -15933,27 +16155,27 @@
               </a:spcAft>
             </a:pPr>
             <a:r>
-              <a:rPr sz="1100" b="1">
-                <a:solidFill>
-                  <a:srgbClr val="E6EDF7"/>
-                </a:solidFill>
-                <a:latin typeface="Calibri"/>
-              </a:rPr>
-              <a:t>40k Free · 2k Pro · 40 Team · 1 Enterprise</a:t>
-            </a:r>
-          </a:p>
-        </p:txBody>
-      </p:sp>
-      <p:sp>
-        <p:nvSpPr>
-          <p:cNvPr id="37" name="TextBox 36"/>
-          <p:cNvSpPr txBox="1"/>
-          <p:nvPr/>
-        </p:nvSpPr>
-        <p:spPr>
-          <a:xfrm>
-            <a:off x="8321040" y="4114800"/>
-            <a:ext cx="3154680" cy="457200"/>
+              <a:rPr sz="1000" b="1">
+                <a:solidFill>
+                  <a:srgbClr val="94A3C4"/>
+                </a:solidFill>
+                <a:latin typeface="Calibri"/>
+              </a:rPr>
+              <a:t>PRO</a:t>
+            </a:r>
+          </a:p>
+        </p:txBody>
+      </p:sp>
+      <p:sp>
+        <p:nvSpPr>
+          <p:cNvPr id="42" name="TextBox 41"/>
+          <p:cNvSpPr txBox="1"/>
+          <p:nvPr/>
+        </p:nvSpPr>
+        <p:spPr>
+          <a:xfrm>
+            <a:off x="6309360" y="3584448"/>
+            <a:ext cx="2194560" cy="411480"/>
           </a:xfrm>
           <a:prstGeom prst="rect">
             <a:avLst/>
@@ -15975,27 +16197,153 @@
               </a:spcAft>
             </a:pPr>
             <a:r>
-              <a:rPr sz="1100" b="0">
+              <a:rPr sz="1800" b="1">
+                <a:solidFill>
+                  <a:srgbClr val="A78BFA"/>
+                </a:solidFill>
+                <a:latin typeface="Calibri"/>
+              </a:rPr>
+              <a:t>$9 / mo</a:t>
+            </a:r>
+          </a:p>
+        </p:txBody>
+      </p:sp>
+      <p:sp>
+        <p:nvSpPr>
+          <p:cNvPr id="43" name="TextBox 42"/>
+          <p:cNvSpPr txBox="1"/>
+          <p:nvPr/>
+        </p:nvSpPr>
+        <p:spPr>
+          <a:xfrm>
+            <a:off x="6309360" y="3886200"/>
+            <a:ext cx="2194560" cy="292608"/>
+          </a:xfrm>
+          <a:prstGeom prst="rect">
+            <a:avLst/>
+          </a:prstGeom>
+          <a:noFill/>
+        </p:spPr>
+        <p:txBody>
+          <a:bodyPr wrap="square" lIns="45720" rIns="45720" tIns="18288" bIns="18288" anchor="t">
+            <a:spAutoFit/>
+          </a:bodyPr>
+          <a:lstStyle/>
+          <a:p>
+            <a:pPr algn="l">
+              <a:lnSpc>
+                <a:spcPct val="125000"/>
+              </a:lnSpc>
+              <a:spcAft>
+                <a:spcPts val="0"/>
+              </a:spcAft>
+            </a:pPr>
+            <a:r>
+              <a:rPr sz="950" b="0">
                 <a:solidFill>
                   <a:srgbClr val="94A3C4"/>
                 </a:solidFill>
                 <a:latin typeface="Calibri"/>
               </a:rPr>
-              <a:t>$380K spend · 4-person team</a:t>
-            </a:r>
-          </a:p>
-        </p:txBody>
-      </p:sp>
-      <p:sp>
-        <p:nvSpPr>
-          <p:cNvPr id="38" name="Rounded Rectangle 37"/>
+              <a:t>Cloud sync · branded PDF reports · history</a:t>
+            </a:r>
+          </a:p>
+        </p:txBody>
+      </p:sp>
+      <p:sp>
+        <p:nvSpPr>
+          <p:cNvPr id="44" name="TextBox 43"/>
+          <p:cNvSpPr txBox="1"/>
+          <p:nvPr/>
+        </p:nvSpPr>
+        <p:spPr>
+          <a:xfrm>
+            <a:off x="8686799" y="3337560"/>
+            <a:ext cx="2926080" cy="292608"/>
+          </a:xfrm>
+          <a:prstGeom prst="rect">
+            <a:avLst/>
+          </a:prstGeom>
+          <a:noFill/>
+        </p:spPr>
+        <p:txBody>
+          <a:bodyPr wrap="square" lIns="45720" rIns="45720" tIns="18288" bIns="18288" anchor="t">
+            <a:spAutoFit/>
+          </a:bodyPr>
+          <a:lstStyle/>
+          <a:p>
+            <a:pPr algn="l">
+              <a:lnSpc>
+                <a:spcPct val="115000"/>
+              </a:lnSpc>
+              <a:spcAft>
+                <a:spcPts val="0"/>
+              </a:spcAft>
+            </a:pPr>
+            <a:r>
+              <a:rPr sz="1000" b="1">
+                <a:solidFill>
+                  <a:srgbClr val="94A3C4"/>
+                </a:solidFill>
+                <a:latin typeface="Calibri"/>
+              </a:rPr>
+              <a:t>TRACTION</a:t>
+            </a:r>
+          </a:p>
+        </p:txBody>
+      </p:sp>
+      <p:sp>
+        <p:nvSpPr>
+          <p:cNvPr id="45" name="TextBox 44"/>
+          <p:cNvSpPr txBox="1"/>
+          <p:nvPr/>
+        </p:nvSpPr>
+        <p:spPr>
+          <a:xfrm>
+            <a:off x="8686799" y="3584448"/>
+            <a:ext cx="2926080" cy="548640"/>
+          </a:xfrm>
+          <a:prstGeom prst="rect">
+            <a:avLst/>
+          </a:prstGeom>
+          <a:noFill/>
+        </p:spPr>
+        <p:txBody>
+          <a:bodyPr wrap="square" lIns="45720" rIns="45720" tIns="18288" bIns="18288" anchor="t">
+            <a:spAutoFit/>
+          </a:bodyPr>
+          <a:lstStyle/>
+          <a:p>
+            <a:pPr algn="l">
+              <a:lnSpc>
+                <a:spcPct val="130000"/>
+              </a:lnSpc>
+              <a:spcAft>
+                <a:spcPts val="0"/>
+              </a:spcAft>
+            </a:pPr>
+            <a:r>
+              <a:rPr sz="1200" b="1">
+                <a:solidFill>
+                  <a:srgbClr val="E6EDF7"/>
+                </a:solidFill>
+                <a:latin typeface="Calibri"/>
+              </a:rPr>
+              <a:t>8k users · 300 Pro  ·  ~$32K ARR</a:t>
+            </a:r>
+          </a:p>
+        </p:txBody>
+      </p:sp>
+      <p:sp>
+        <p:nvSpPr>
+          <p:cNvPr id="46" name="Rounded Rectangle 45"/>
           <p:cNvSpPr/>
           <p:nvPr/>
         </p:nvSpPr>
         <p:spPr>
           <a:xfrm>
-            <a:off x="5943600" y="4846320"/>
-            <a:ext cx="5760720" cy="1280160"/>
+            <a:off x="4937760" y="4242816"/>
+            <a:ext cx="6766560" cy="978408"/>
           </a:xfrm>
           <a:prstGeom prst="roundRect">
             <a:avLst>
@@ -16003,7 +16351,55 @@
             </a:avLst>
           </a:prstGeom>
           <a:solidFill>
-            <a:srgbClr val="10173A"/>
+            <a:srgbClr val="0F142C"/>
+          </a:solidFill>
+          <a:ln w="9525">
+            <a:solidFill>
+              <a:srgbClr val="2A3555"/>
+            </a:solidFill>
+          </a:ln>
+          <a:effectLst/>
+        </p:spPr>
+        <p:style>
+          <a:lnRef idx="1">
+            <a:schemeClr val="accent1"/>
+          </a:lnRef>
+          <a:fillRef idx="3">
+            <a:schemeClr val="accent1"/>
+          </a:fillRef>
+          <a:effectRef idx="2">
+            <a:schemeClr val="accent1"/>
+          </a:effectRef>
+          <a:fontRef idx="minor">
+            <a:schemeClr val="lt1"/>
+          </a:fontRef>
+        </p:style>
+        <p:txBody>
+          <a:bodyPr rtlCol="0" anchor="ctr"/>
+          <a:lstStyle/>
+          <a:p>
+            <a:pPr algn="ctr"/>
+          </a:p>
+        </p:txBody>
+      </p:sp>
+      <p:sp>
+        <p:nvSpPr>
+          <p:cNvPr id="47" name="Rounded Rectangle 46"/>
+          <p:cNvSpPr/>
+          <p:nvPr/>
+        </p:nvSpPr>
+        <p:spPr>
+          <a:xfrm>
+            <a:off x="5102352" y="4407408"/>
+            <a:ext cx="1051560" cy="649224"/>
+          </a:xfrm>
+          <a:prstGeom prst="roundRect">
+            <a:avLst>
+              <a:gd name="adj" fmla="val 18000"/>
+            </a:avLst>
+          </a:prstGeom>
+          <a:solidFill>
+            <a:srgbClr val="101830"/>
           </a:solidFill>
           <a:ln w="9525">
             <a:solidFill>
@@ -16036,14 +16432,14 @@
       </p:sp>
       <p:sp>
         <p:nvSpPr>
-          <p:cNvPr id="39" name="TextBox 38"/>
-          <p:cNvSpPr txBox="1"/>
-          <p:nvPr/>
-        </p:nvSpPr>
-        <p:spPr>
-          <a:xfrm>
-            <a:off x="6172200" y="5029200"/>
-            <a:ext cx="2286000" cy="365760"/>
+          <p:cNvPr id="48" name="TextBox 47"/>
+          <p:cNvSpPr txBox="1"/>
+          <p:nvPr/>
+        </p:nvSpPr>
+        <p:spPr>
+          <a:xfrm>
+            <a:off x="5102352" y="4443984"/>
+            <a:ext cx="1051560" cy="292608"/>
           </a:xfrm>
           <a:prstGeom prst="rect">
             <a:avLst/>
@@ -16056,7 +16452,7 @@
           </a:bodyPr>
           <a:lstStyle/>
           <a:p>
-            <a:pPr algn="l">
+            <a:pPr algn="ctr">
               <a:lnSpc>
                 <a:spcPct val="115000"/>
               </a:lnSpc>
@@ -16065,27 +16461,27 @@
               </a:spcAft>
             </a:pPr>
             <a:r>
-              <a:rPr sz="1400" b="1">
-                <a:solidFill>
-                  <a:srgbClr val="E6EDF7"/>
-                </a:solidFill>
-                <a:latin typeface="Calibri"/>
-              </a:rPr>
-              <a:t>Y3 · Embed</a:t>
-            </a:r>
-          </a:p>
-        </p:txBody>
-      </p:sp>
-      <p:sp>
-        <p:nvSpPr>
-          <p:cNvPr id="40" name="TextBox 39"/>
-          <p:cNvSpPr txBox="1"/>
-          <p:nvPr/>
-        </p:nvSpPr>
-        <p:spPr>
-          <a:xfrm>
-            <a:off x="6172200" y="5394960"/>
-            <a:ext cx="2286000" cy="640080"/>
+              <a:rPr sz="1000" b="1">
+                <a:solidFill>
+                  <a:srgbClr val="34D399"/>
+                </a:solidFill>
+                <a:latin typeface="Calibri"/>
+              </a:rPr>
+              <a:t>9 MONTHS</a:t>
+            </a:r>
+          </a:p>
+        </p:txBody>
+      </p:sp>
+      <p:sp>
+        <p:nvSpPr>
+          <p:cNvPr id="49" name="TextBox 48"/>
+          <p:cNvSpPr txBox="1"/>
+          <p:nvPr/>
+        </p:nvSpPr>
+        <p:spPr>
+          <a:xfrm>
+            <a:off x="5102352" y="4700016"/>
+            <a:ext cx="1051560" cy="365760"/>
           </a:xfrm>
           <a:prstGeom prst="rect">
             <a:avLst/>
@@ -16098,36 +16494,36 @@
           </a:bodyPr>
           <a:lstStyle/>
           <a:p>
-            <a:pPr algn="l">
-              <a:lnSpc>
-                <a:spcPct val="115000"/>
+            <a:pPr algn="ctr">
+              <a:lnSpc>
+                <a:spcPct val="110000"/>
               </a:lnSpc>
               <a:spcAft>
                 <a:spcPts val="0"/>
               </a:spcAft>
             </a:pPr>
             <a:r>
-              <a:rPr sz="3200" b="1">
-                <a:solidFill>
-                  <a:srgbClr val="34D399"/>
-                </a:solidFill>
-                <a:latin typeface="Calibri"/>
-              </a:rPr>
-              <a:t>$2.4M</a:t>
-            </a:r>
-          </a:p>
-        </p:txBody>
-      </p:sp>
-      <p:sp>
-        <p:nvSpPr>
-          <p:cNvPr id="41" name="TextBox 40"/>
-          <p:cNvSpPr txBox="1"/>
-          <p:nvPr/>
-        </p:nvSpPr>
-        <p:spPr>
-          <a:xfrm>
-            <a:off x="8321040" y="5074920"/>
-            <a:ext cx="3154680" cy="365760"/>
+              <a:rPr sz="1200" b="1">
+                <a:solidFill>
+                  <a:srgbClr val="E6EDF7"/>
+                </a:solidFill>
+                <a:latin typeface="Calibri"/>
+              </a:rPr>
+              <a:t>Team + API</a:t>
+            </a:r>
+          </a:p>
+        </p:txBody>
+      </p:sp>
+      <p:sp>
+        <p:nvSpPr>
+          <p:cNvPr id="50" name="TextBox 49"/>
+          <p:cNvSpPr txBox="1"/>
+          <p:nvPr/>
+        </p:nvSpPr>
+        <p:spPr>
+          <a:xfrm>
+            <a:off x="6309360" y="4407408"/>
+            <a:ext cx="2194560" cy="292608"/>
           </a:xfrm>
           <a:prstGeom prst="rect">
             <a:avLst/>
@@ -16149,27 +16545,27 @@
               </a:spcAft>
             </a:pPr>
             <a:r>
-              <a:rPr sz="1100" b="1">
-                <a:solidFill>
-                  <a:srgbClr val="E6EDF7"/>
-                </a:solidFill>
-                <a:latin typeface="Calibri"/>
-              </a:rPr>
-              <a:t>200k Free · 9k Pro · 180 Team · 3 Enterprise</a:t>
-            </a:r>
-          </a:p>
-        </p:txBody>
-      </p:sp>
-      <p:sp>
-        <p:nvSpPr>
-          <p:cNvPr id="42" name="TextBox 41"/>
-          <p:cNvSpPr txBox="1"/>
-          <p:nvPr/>
-        </p:nvSpPr>
-        <p:spPr>
-          <a:xfrm>
-            <a:off x="8321040" y="5486400"/>
-            <a:ext cx="3154680" cy="457200"/>
+              <a:rPr sz="1000" b="1">
+                <a:solidFill>
+                  <a:srgbClr val="94A3C4"/>
+                </a:solidFill>
+                <a:latin typeface="Calibri"/>
+              </a:rPr>
+              <a:t>TEAM / API</a:t>
+            </a:r>
+          </a:p>
+        </p:txBody>
+      </p:sp>
+      <p:sp>
+        <p:nvSpPr>
+          <p:cNvPr id="51" name="TextBox 50"/>
+          <p:cNvSpPr txBox="1"/>
+          <p:nvPr/>
+        </p:nvSpPr>
+        <p:spPr>
+          <a:xfrm>
+            <a:off x="6309360" y="4654296"/>
+            <a:ext cx="2194560" cy="411480"/>
           </a:xfrm>
           <a:prstGeom prst="rect">
             <a:avLst/>
@@ -16191,20 +16587,536 @@
               </a:spcAft>
             </a:pPr>
             <a:r>
-              <a:rPr sz="1100" b="0">
+              <a:rPr sz="1800" b="1">
+                <a:solidFill>
+                  <a:srgbClr val="34D399"/>
+                </a:solidFill>
+                <a:latin typeface="Calibri"/>
+              </a:rPr>
+              <a:t>$99 / mo  ·  $0.05 / image</a:t>
+            </a:r>
+          </a:p>
+        </p:txBody>
+      </p:sp>
+      <p:sp>
+        <p:nvSpPr>
+          <p:cNvPr id="52" name="TextBox 51"/>
+          <p:cNvSpPr txBox="1"/>
+          <p:nvPr/>
+        </p:nvSpPr>
+        <p:spPr>
+          <a:xfrm>
+            <a:off x="6309360" y="4956048"/>
+            <a:ext cx="2194560" cy="292608"/>
+          </a:xfrm>
+          <a:prstGeom prst="rect">
+            <a:avLst/>
+          </a:prstGeom>
+          <a:noFill/>
+        </p:spPr>
+        <p:txBody>
+          <a:bodyPr wrap="square" lIns="45720" rIns="45720" tIns="18288" bIns="18288" anchor="t">
+            <a:spAutoFit/>
+          </a:bodyPr>
+          <a:lstStyle/>
+          <a:p>
+            <a:pPr algn="l">
+              <a:lnSpc>
+                <a:spcPct val="125000"/>
+              </a:lnSpc>
+              <a:spcAft>
+                <a:spcPts val="0"/>
+              </a:spcAft>
+            </a:pPr>
+            <a:r>
+              <a:rPr sz="950" b="0">
                 <a:solidFill>
                   <a:srgbClr val="94A3C4"/>
                 </a:solidFill>
                 <a:latin typeface="Calibri"/>
               </a:rPr>
-              <a:t>$1.4M spend · break-even by Q4</a:t>
-            </a:r>
-          </a:p>
-        </p:txBody>
-      </p:sp>
-      <p:sp>
-        <p:nvSpPr>
-          <p:cNvPr id="43" name="TextBox 42"/>
+              <a:t>Multi-seat dashboards · API for OEMs / labs</a:t>
+            </a:r>
+          </a:p>
+        </p:txBody>
+      </p:sp>
+      <p:sp>
+        <p:nvSpPr>
+          <p:cNvPr id="53" name="TextBox 52"/>
+          <p:cNvSpPr txBox="1"/>
+          <p:nvPr/>
+        </p:nvSpPr>
+        <p:spPr>
+          <a:xfrm>
+            <a:off x="8686799" y="4407408"/>
+            <a:ext cx="2926080" cy="292608"/>
+          </a:xfrm>
+          <a:prstGeom prst="rect">
+            <a:avLst/>
+          </a:prstGeom>
+          <a:noFill/>
+        </p:spPr>
+        <p:txBody>
+          <a:bodyPr wrap="square" lIns="45720" rIns="45720" tIns="18288" bIns="18288" anchor="t">
+            <a:spAutoFit/>
+          </a:bodyPr>
+          <a:lstStyle/>
+          <a:p>
+            <a:pPr algn="l">
+              <a:lnSpc>
+                <a:spcPct val="115000"/>
+              </a:lnSpc>
+              <a:spcAft>
+                <a:spcPts val="0"/>
+              </a:spcAft>
+            </a:pPr>
+            <a:r>
+              <a:rPr sz="1000" b="1">
+                <a:solidFill>
+                  <a:srgbClr val="94A3C4"/>
+                </a:solidFill>
+                <a:latin typeface="Calibri"/>
+              </a:rPr>
+              <a:t>TRACTION</a:t>
+            </a:r>
+          </a:p>
+        </p:txBody>
+      </p:sp>
+      <p:sp>
+        <p:nvSpPr>
+          <p:cNvPr id="54" name="TextBox 53"/>
+          <p:cNvSpPr txBox="1"/>
+          <p:nvPr/>
+        </p:nvSpPr>
+        <p:spPr>
+          <a:xfrm>
+            <a:off x="8686799" y="4654296"/>
+            <a:ext cx="2926080" cy="548640"/>
+          </a:xfrm>
+          <a:prstGeom prst="rect">
+            <a:avLst/>
+          </a:prstGeom>
+          <a:noFill/>
+        </p:spPr>
+        <p:txBody>
+          <a:bodyPr wrap="square" lIns="45720" rIns="45720" tIns="18288" bIns="18288" anchor="t">
+            <a:spAutoFit/>
+          </a:bodyPr>
+          <a:lstStyle/>
+          <a:p>
+            <a:pPr algn="l">
+              <a:lnSpc>
+                <a:spcPct val="130000"/>
+              </a:lnSpc>
+              <a:spcAft>
+                <a:spcPts val="0"/>
+              </a:spcAft>
+            </a:pPr>
+            <a:r>
+              <a:rPr sz="1200" b="1">
+                <a:solidFill>
+                  <a:srgbClr val="E6EDF7"/>
+                </a:solidFill>
+                <a:latin typeface="Calibri"/>
+              </a:rPr>
+              <a:t>20k users · 1.2k Pro · 25 Team  ·  ~$160K ARR</a:t>
+            </a:r>
+          </a:p>
+        </p:txBody>
+      </p:sp>
+      <p:sp>
+        <p:nvSpPr>
+          <p:cNvPr id="55" name="Rounded Rectangle 54"/>
+          <p:cNvSpPr/>
+          <p:nvPr/>
+        </p:nvSpPr>
+        <p:spPr>
+          <a:xfrm>
+            <a:off x="4937760" y="5312664"/>
+            <a:ext cx="6766560" cy="978408"/>
+          </a:xfrm>
+          <a:prstGeom prst="roundRect">
+            <a:avLst>
+              <a:gd name="adj" fmla="val 6000"/>
+            </a:avLst>
+          </a:prstGeom>
+          <a:solidFill>
+            <a:srgbClr val="10173A"/>
+          </a:solidFill>
+          <a:ln w="9525">
+            <a:solidFill>
+              <a:srgbClr val="FBBF24"/>
+            </a:solidFill>
+          </a:ln>
+          <a:effectLst/>
+        </p:spPr>
+        <p:style>
+          <a:lnRef idx="1">
+            <a:schemeClr val="accent1"/>
+          </a:lnRef>
+          <a:fillRef idx="3">
+            <a:schemeClr val="accent1"/>
+          </a:fillRef>
+          <a:effectRef idx="2">
+            <a:schemeClr val="accent1"/>
+          </a:effectRef>
+          <a:fontRef idx="minor">
+            <a:schemeClr val="lt1"/>
+          </a:fontRef>
+        </p:style>
+        <p:txBody>
+          <a:bodyPr rtlCol="0" anchor="ctr"/>
+          <a:lstStyle/>
+          <a:p>
+            <a:pPr algn="ctr"/>
+          </a:p>
+        </p:txBody>
+      </p:sp>
+      <p:sp>
+        <p:nvSpPr>
+          <p:cNvPr id="56" name="Rounded Rectangle 55"/>
+          <p:cNvSpPr/>
+          <p:nvPr/>
+        </p:nvSpPr>
+        <p:spPr>
+          <a:xfrm>
+            <a:off x="5102352" y="5477256"/>
+            <a:ext cx="1051560" cy="649224"/>
+          </a:xfrm>
+          <a:prstGeom prst="roundRect">
+            <a:avLst>
+              <a:gd name="adj" fmla="val 18000"/>
+            </a:avLst>
+          </a:prstGeom>
+          <a:solidFill>
+            <a:srgbClr val="101830"/>
+          </a:solidFill>
+          <a:ln w="9525">
+            <a:solidFill>
+              <a:srgbClr val="FBBF24"/>
+            </a:solidFill>
+          </a:ln>
+          <a:effectLst/>
+        </p:spPr>
+        <p:style>
+          <a:lnRef idx="1">
+            <a:schemeClr val="accent1"/>
+          </a:lnRef>
+          <a:fillRef idx="3">
+            <a:schemeClr val="accent1"/>
+          </a:fillRef>
+          <a:effectRef idx="2">
+            <a:schemeClr val="accent1"/>
+          </a:effectRef>
+          <a:fontRef idx="minor">
+            <a:schemeClr val="lt1"/>
+          </a:fontRef>
+        </p:style>
+        <p:txBody>
+          <a:bodyPr rtlCol="0" anchor="ctr"/>
+          <a:lstStyle/>
+          <a:p>
+            <a:pPr algn="ctr"/>
+          </a:p>
+        </p:txBody>
+      </p:sp>
+      <p:sp>
+        <p:nvSpPr>
+          <p:cNvPr id="57" name="TextBox 56"/>
+          <p:cNvSpPr txBox="1"/>
+          <p:nvPr/>
+        </p:nvSpPr>
+        <p:spPr>
+          <a:xfrm>
+            <a:off x="5102352" y="5513832"/>
+            <a:ext cx="1051560" cy="292608"/>
+          </a:xfrm>
+          <a:prstGeom prst="rect">
+            <a:avLst/>
+          </a:prstGeom>
+          <a:noFill/>
+        </p:spPr>
+        <p:txBody>
+          <a:bodyPr wrap="square" lIns="45720" rIns="45720" tIns="18288" bIns="18288" anchor="t">
+            <a:spAutoFit/>
+          </a:bodyPr>
+          <a:lstStyle/>
+          <a:p>
+            <a:pPr algn="ctr">
+              <a:lnSpc>
+                <a:spcPct val="115000"/>
+              </a:lnSpc>
+              <a:spcAft>
+                <a:spcPts val="0"/>
+              </a:spcAft>
+            </a:pPr>
+            <a:r>
+              <a:rPr sz="1000" b="1">
+                <a:solidFill>
+                  <a:srgbClr val="FBBF24"/>
+                </a:solidFill>
+                <a:latin typeface="Calibri"/>
+              </a:rPr>
+              <a:t>12 MONTHS</a:t>
+            </a:r>
+          </a:p>
+        </p:txBody>
+      </p:sp>
+      <p:sp>
+        <p:nvSpPr>
+          <p:cNvPr id="58" name="TextBox 57"/>
+          <p:cNvSpPr txBox="1"/>
+          <p:nvPr/>
+        </p:nvSpPr>
+        <p:spPr>
+          <a:xfrm>
+            <a:off x="5102352" y="5769864"/>
+            <a:ext cx="1051560" cy="365760"/>
+          </a:xfrm>
+          <a:prstGeom prst="rect">
+            <a:avLst/>
+          </a:prstGeom>
+          <a:noFill/>
+        </p:spPr>
+        <p:txBody>
+          <a:bodyPr wrap="square" lIns="45720" rIns="45720" tIns="18288" bIns="18288" anchor="t">
+            <a:spAutoFit/>
+          </a:bodyPr>
+          <a:lstStyle/>
+          <a:p>
+            <a:pPr algn="ctr">
+              <a:lnSpc>
+                <a:spcPct val="110000"/>
+              </a:lnSpc>
+              <a:spcAft>
+                <a:spcPts val="0"/>
+              </a:spcAft>
+            </a:pPr>
+            <a:r>
+              <a:rPr sz="1200" b="1">
+                <a:solidFill>
+                  <a:srgbClr val="E6EDF7"/>
+                </a:solidFill>
+                <a:latin typeface="Calibri"/>
+              </a:rPr>
+              <a:t>Enterprise pilot</a:t>
+            </a:r>
+          </a:p>
+        </p:txBody>
+      </p:sp>
+      <p:sp>
+        <p:nvSpPr>
+          <p:cNvPr id="59" name="TextBox 58"/>
+          <p:cNvSpPr txBox="1"/>
+          <p:nvPr/>
+        </p:nvSpPr>
+        <p:spPr>
+          <a:xfrm>
+            <a:off x="6309360" y="5477256"/>
+            <a:ext cx="2194560" cy="292608"/>
+          </a:xfrm>
+          <a:prstGeom prst="rect">
+            <a:avLst/>
+          </a:prstGeom>
+          <a:noFill/>
+        </p:spPr>
+        <p:txBody>
+          <a:bodyPr wrap="square" lIns="45720" rIns="45720" tIns="18288" bIns="18288" anchor="t">
+            <a:spAutoFit/>
+          </a:bodyPr>
+          <a:lstStyle/>
+          <a:p>
+            <a:pPr algn="l">
+              <a:lnSpc>
+                <a:spcPct val="115000"/>
+              </a:lnSpc>
+              <a:spcAft>
+                <a:spcPts val="0"/>
+              </a:spcAft>
+            </a:pPr>
+            <a:r>
+              <a:rPr sz="1000" b="1">
+                <a:solidFill>
+                  <a:srgbClr val="94A3C4"/>
+                </a:solidFill>
+                <a:latin typeface="Calibri"/>
+              </a:rPr>
+              <a:t>ENTERPRISE</a:t>
+            </a:r>
+          </a:p>
+        </p:txBody>
+      </p:sp>
+      <p:sp>
+        <p:nvSpPr>
+          <p:cNvPr id="60" name="TextBox 59"/>
+          <p:cNvSpPr txBox="1"/>
+          <p:nvPr/>
+        </p:nvSpPr>
+        <p:spPr>
+          <a:xfrm>
+            <a:off x="6309360" y="5724144"/>
+            <a:ext cx="2194560" cy="411480"/>
+          </a:xfrm>
+          <a:prstGeom prst="rect">
+            <a:avLst/>
+          </a:prstGeom>
+          <a:noFill/>
+        </p:spPr>
+        <p:txBody>
+          <a:bodyPr wrap="square" lIns="45720" rIns="45720" tIns="18288" bIns="18288" anchor="t">
+            <a:spAutoFit/>
+          </a:bodyPr>
+          <a:lstStyle/>
+          <a:p>
+            <a:pPr algn="l">
+              <a:lnSpc>
+                <a:spcPct val="115000"/>
+              </a:lnSpc>
+              <a:spcAft>
+                <a:spcPts val="0"/>
+              </a:spcAft>
+            </a:pPr>
+            <a:r>
+              <a:rPr sz="1800" b="1">
+                <a:solidFill>
+                  <a:srgbClr val="FBBF24"/>
+                </a:solidFill>
+                <a:latin typeface="Calibri"/>
+              </a:rPr>
+              <a:t>$5–50K / yr</a:t>
+            </a:r>
+          </a:p>
+        </p:txBody>
+      </p:sp>
+      <p:sp>
+        <p:nvSpPr>
+          <p:cNvPr id="61" name="TextBox 60"/>
+          <p:cNvSpPr txBox="1"/>
+          <p:nvPr/>
+        </p:nvSpPr>
+        <p:spPr>
+          <a:xfrm>
+            <a:off x="6309360" y="6025896"/>
+            <a:ext cx="2194560" cy="292608"/>
+          </a:xfrm>
+          <a:prstGeom prst="rect">
+            <a:avLst/>
+          </a:prstGeom>
+          <a:noFill/>
+        </p:spPr>
+        <p:txBody>
+          <a:bodyPr wrap="square" lIns="45720" rIns="45720" tIns="18288" bIns="18288" anchor="t">
+            <a:spAutoFit/>
+          </a:bodyPr>
+          <a:lstStyle/>
+          <a:p>
+            <a:pPr algn="l">
+              <a:lnSpc>
+                <a:spcPct val="125000"/>
+              </a:lnSpc>
+              <a:spcAft>
+                <a:spcPts val="0"/>
+              </a:spcAft>
+            </a:pPr>
+            <a:r>
+              <a:rPr sz="950" b="0">
+                <a:solidFill>
+                  <a:srgbClr val="94A3C4"/>
+                </a:solidFill>
+                <a:latin typeface="Calibri"/>
+              </a:rPr>
+              <a:t>On-prem / air-gapped · compliance reports</a:t>
+            </a:r>
+          </a:p>
+        </p:txBody>
+      </p:sp>
+      <p:sp>
+        <p:nvSpPr>
+          <p:cNvPr id="62" name="TextBox 61"/>
+          <p:cNvSpPr txBox="1"/>
+          <p:nvPr/>
+        </p:nvSpPr>
+        <p:spPr>
+          <a:xfrm>
+            <a:off x="8686799" y="5477256"/>
+            <a:ext cx="2926080" cy="292608"/>
+          </a:xfrm>
+          <a:prstGeom prst="rect">
+            <a:avLst/>
+          </a:prstGeom>
+          <a:noFill/>
+        </p:spPr>
+        <p:txBody>
+          <a:bodyPr wrap="square" lIns="45720" rIns="45720" tIns="18288" bIns="18288" anchor="t">
+            <a:spAutoFit/>
+          </a:bodyPr>
+          <a:lstStyle/>
+          <a:p>
+            <a:pPr algn="l">
+              <a:lnSpc>
+                <a:spcPct val="115000"/>
+              </a:lnSpc>
+              <a:spcAft>
+                <a:spcPts val="0"/>
+              </a:spcAft>
+            </a:pPr>
+            <a:r>
+              <a:rPr sz="1000" b="1">
+                <a:solidFill>
+                  <a:srgbClr val="94A3C4"/>
+                </a:solidFill>
+                <a:latin typeface="Calibri"/>
+              </a:rPr>
+              <a:t>TRACTION</a:t>
+            </a:r>
+          </a:p>
+        </p:txBody>
+      </p:sp>
+      <p:sp>
+        <p:nvSpPr>
+          <p:cNvPr id="63" name="TextBox 62"/>
+          <p:cNvSpPr txBox="1"/>
+          <p:nvPr/>
+        </p:nvSpPr>
+        <p:spPr>
+          <a:xfrm>
+            <a:off x="8686799" y="5724144"/>
+            <a:ext cx="2926080" cy="548640"/>
+          </a:xfrm>
+          <a:prstGeom prst="rect">
+            <a:avLst/>
+          </a:prstGeom>
+          <a:noFill/>
+        </p:spPr>
+        <p:txBody>
+          <a:bodyPr wrap="square" lIns="45720" rIns="45720" tIns="18288" bIns="18288" anchor="t">
+            <a:spAutoFit/>
+          </a:bodyPr>
+          <a:lstStyle/>
+          <a:p>
+            <a:pPr algn="l">
+              <a:lnSpc>
+                <a:spcPct val="130000"/>
+              </a:lnSpc>
+              <a:spcAft>
+                <a:spcPts val="0"/>
+              </a:spcAft>
+            </a:pPr>
+            <a:r>
+              <a:rPr sz="1200" b="1">
+                <a:solidFill>
+                  <a:srgbClr val="E6EDF7"/>
+                </a:solidFill>
+                <a:latin typeface="Calibri"/>
+              </a:rPr>
+              <a:t>35k users · 2.5k Pro · 60 Team · 2 Enterprise  ·  ~$420K ARR</a:t>
+            </a:r>
+          </a:p>
+        </p:txBody>
+      </p:sp>
+      <p:sp>
+        <p:nvSpPr>
+          <p:cNvPr id="64" name="TextBox 63"/>
           <p:cNvSpPr txBox="1"/>
           <p:nvPr/>
         </p:nvSpPr>
